--- a/ground-vehicle/docs/courses/beginner-ps3/l5_maneuvers_with_lights.pptx
+++ b/ground-vehicle/docs/courses/beginner-ps3/l5_maneuvers_with_lights.pptx
@@ -1266,6 +1266,14 @@
               <a:t>The amber only appears on one side because the pattern picks a side from the sign of the turn value.</a:t>
             </a:r>
           </a:p>
+          <a:p>
+            <a:r>
+              <a:rPr sz="1200">
+                <a:latin typeface="Calibri"/>
+              </a:rPr>
+              <a:t>ANSWER, brake lights: line 283 starts every pass assuming LIGHTS_STOPPED, and only driving or turning changes it. Then line 176, in showDrivingLights(), turns the rear bar brake red whenever the pattern is LIGHTS_STOPPED. So letting go of the stick IS what puts the brake lights on.</a:t>
+            </a:r>
+          </a:p>
         </p:txBody>
       </p:sp>
       <p:sp>
@@ -1336,7 +1344,7 @@
               <a:rPr sz="1200">
                 <a:latin typeface="Calibri"/>
               </a:rPr>
-              <a:t>Forty-five minutes on the real program. Have it open on the projector.</a:t>
+              <a:t>55 minutes on the real program, the race included. Have it open on the projector.</a:t>
             </a:r>
           </a:p>
           <a:p>
@@ -1417,7 +1425,7 @@
               <a:rPr sz="1200">
                 <a:latin typeface="Calibri"/>
               </a:rPr>
-              <a:t>Go down the right-hand column and let them realise how much of it they recognise. That is the point of the table.</a:t>
+              <a:t>Go down the right-hand column and let them realize how much of it they recognize. That is the point of the table.</a:t>
             </a:r>
           </a:p>
           <a:p>
@@ -1894,7 +1902,7 @@
               <a:rPr sz="1200">
                 <a:latin typeface="Calibri"/>
               </a:rPr>
-              <a:t>Section 2 is the confidence builder. They will recognise STICK_DEADZONE, MOTOR_MAX and the LED count as numbers they have already changed with their own hands.</a:t>
+              <a:t>Section 2 is the confidence builder. They will recognize STICK_DEADZONE, MOTOR_MAX and the LED count as numbers they have already changed with their own hands.</a:t>
             </a:r>
           </a:p>
           <a:p>
@@ -2120,7 +2128,7 @@
               <a:rPr sz="1200">
                 <a:latin typeface="Calibri"/>
               </a:rPr>
-              <a:t>The green blink means it is waiting for a controller. They saw showWaitingLights() in the code.</a:t>
+              <a:t>The green blink means it is waiting for a controller. They saw showWaitingLights() in the code. A green blink that never stops usually means step 3 was skipped - the Serial Monitor says which address it is listening as.</a:t>
             </a:r>
           </a:p>
           <a:p>
@@ -2338,7 +2346,7 @@
               <a:rPr sz="1200">
                 <a:latin typeface="Calibri"/>
               </a:rPr>
-              <a:t>If anybody is staying on after the course, get them to pick one today while the enthusiasm is high.</a:t>
+              <a:t>If anybody is staying on after the course, get them to pick one today while the enthusiasm is high. The cheat sheet from Lesson 1 covers all the C++ these projects need.</a:t>
             </a:r>
           </a:p>
         </p:txBody>
@@ -2767,7 +2775,7 @@
               <a:rPr sz="1200">
                 <a:latin typeface="Calibri"/>
               </a:rPr>
-              <a:t>Answers, in order: delay stops everything, so two different rates cannot both be served; the four-line pattern should be written out and checked; unsigned long because an int overflows in under an hour.</a:t>
+              <a:t>Answers, in order: delay stops everything, so two different rates cannot both be served; the four-line pattern, written out:  unsigned long last = 0;  then in loop()  if (millis() - last &gt;= INTERVAL) { last = millis(); ...do the thing... }; unsigned long because it is what millis() returns and it never goes negative - an int would after about 25 days.</a:t>
             </a:r>
           </a:p>
           <a:p>
@@ -2784,6 +2792,14 @@
                 <a:latin typeface="Calibri"/>
               </a:rPr>
               <a:t>A servo centers on a 1.5 ms pulse, sent every 20 ms.</a:t>
+            </a:r>
+          </a:p>
+          <a:p>
+            <a:r>
+              <a:rPr sz="1200">
+                <a:latin typeface="Calibri"/>
+              </a:rPr>
+              <a:t>For question 7, any three of: two servos aimed with the right stick, the KITT scanner without delay(), the sharp-steering toggle on the stick click, and the startup light show.</a:t>
             </a:r>
           </a:p>
           <a:p>
@@ -3163,7 +3179,7 @@
               <a:rPr sz="1200">
                 <a:latin typeface="Calibri"/>
               </a:rPr>
-              <a:t>unsigned long matters: an int overflows in under an hour. Subtracting rather than comparing is also what survives the wrap at 49 days.</a:t>
+              <a:t>unsigned long matters because it is what millis() returns. On an ESP32 an int is the same size but signed, so it would go negative after about 25 days. On a classic Arduino Uno, where an int is only 16 bits, it goes wrong after 33 seconds - which is where most of the warnings they will read online come from. Subtracting rather than comparing is also what survives the wrap at 49 days.</a:t>
             </a:r>
           </a:p>
         </p:txBody>
@@ -3334,6 +3350,14 @@
                 <a:latin typeface="Calibri"/>
               </a:rPr>
               <a:t>Nothing moves in this one, so no blocks needed.</a:t>
+            </a:r>
+          </a:p>
+          <a:p>
+            <a:r>
+              <a:rPr sz="1200">
+                <a:latin typeface="Calibri"/>
+              </a:rPr>
+              <a:t>ANSWERS. Without the delay, loop() runs tens of thousands of times a second - the exact number varies, so take theirs. With delay(1000) it runs once a second, so the count reads 1: the vehicle has gone from checking everything tens of thousands of times a second to once, and for the other 999 milliseconds it is not reading the controller, the lights or anything else.</a:t>
             </a:r>
           </a:p>
         </p:txBody>
@@ -8492,7 +8516,7 @@
                 </a:solidFill>
                 <a:latin typeface="Calibri"/>
               </a:rPr>
-              <a:t>1.  Upload it.</a:t>
+              <a:t>1.  Set PS3_MAC_ADDRESS. Upload it.</a:t>
             </a:r>
           </a:p>
           <a:p>
@@ -11625,7 +11649,7 @@
                 </a:solidFill>
                 <a:latin typeface="Calibri"/>
               </a:rPr>
-              <a:t>1.  Wheels off the ground. Upload. Check the controls.</a:t>
+              <a:t>1.  Set PS3_MAC_ADDRESS. Wheels off the ground. Upload. Check the controls.</a:t>
             </a:r>
           </a:p>
           <a:p>
@@ -11650,7 +11674,7 @@
                 </a:solidFill>
                 <a:latin typeface="Calibri"/>
               </a:rPr>
-              <a:t>2.  Put it down and drive. Watch the lights follow the stick: headlights, tail lights, brake lights when you stop, white in reverse, amber on the side you are turning toward.</a:t>
+              <a:t>2.  Put it down and drive. The lights follow the stick: headlights, brake lights when you stop, white in reverse, amber on the side you turn toward.</a:t>
             </a:r>
           </a:p>
           <a:p>
@@ -15489,7 +15513,7 @@
                 </a:solidFill>
                 <a:latin typeface="Calibri"/>
               </a:rPr>
-              <a:t>Watch out for which kind you have. A standard servo takes a position, plus or minus 180 degrees. A CONTINUOUS ROTATION servo reads the same pulse as a SPEED and will just keep turning.</a:t>
+              <a:t>Watch out for which kind you have. A standard servo takes a position, across about 180 degrees. A CONTINUOUS ROTATION servo reads the same pulse as a SPEED and will just keep turning.</a:t>
             </a:r>
           </a:p>
         </p:txBody>
@@ -17609,7 +17633,7 @@
                 <a:spcPct val="100000"/>
               </a:lnSpc>
               <a:spcAft>
-                <a:spcPts val="800"/>
+                <a:spcPts val="400"/>
               </a:spcAft>
               <a:defRPr sz="1800" b="0">
                 <a:solidFill>
@@ -17634,7 +17658,7 @@
                 <a:spcPct val="100000"/>
               </a:lnSpc>
               <a:spcAft>
-                <a:spcPts val="800"/>
+                <a:spcPts val="400"/>
               </a:spcAft>
               <a:defRPr sz="1800" b="0">
                 <a:solidFill>
@@ -17650,7 +17674,7 @@
                 </a:solidFill>
                 <a:latin typeface="Calibri"/>
               </a:rPr>
-              <a:t>2.  READ IT FIRST. You will recognise almost all of it.</a:t>
+              <a:t>2.  READ IT FIRST. You will recognize almost all of it.</a:t>
             </a:r>
           </a:p>
           <a:p>
@@ -17659,7 +17683,7 @@
                 <a:spcPct val="100000"/>
               </a:lnSpc>
               <a:spcAft>
-                <a:spcPts val="800"/>
+                <a:spcPts val="400"/>
               </a:spcAft>
               <a:defRPr sz="1800" b="0">
                 <a:solidFill>
@@ -17675,7 +17699,7 @@
                 </a:solidFill>
                 <a:latin typeface="Calibri"/>
               </a:rPr>
-              <a:t>3.  Set PS3_MAC_ADDRESS to your vehicle's address.</a:t>
+              <a:t>3.  Set PS3_MAC_ADDRESS to the number on your controller's sticker.</a:t>
             </a:r>
           </a:p>
           <a:p>
@@ -17684,7 +17708,7 @@
                 <a:spcPct val="100000"/>
               </a:lnSpc>
               <a:spcAft>
-                <a:spcPts val="800"/>
+                <a:spcPts val="400"/>
               </a:spcAft>
               <a:defRPr sz="1800" b="0">
                 <a:solidFill>
@@ -17709,7 +17733,7 @@
                 <a:spcPct val="100000"/>
               </a:lnSpc>
               <a:spcAft>
-                <a:spcPts val="800"/>
+                <a:spcPts val="400"/>
               </a:spcAft>
               <a:defRPr sz="1800" b="0">
                 <a:solidFill>
@@ -17734,7 +17758,7 @@
                 <a:spcPct val="100000"/>
               </a:lnSpc>
               <a:spcAft>
-                <a:spcPts val="800"/>
+                <a:spcPts val="400"/>
               </a:spcAft>
               <a:defRPr sz="1800" b="0">
                 <a:solidFill>
@@ -27066,7 +27090,7 @@
                 </a:solidFill>
                 <a:latin typeface="Calibri"/>
               </a:rPr>
-              <a:t>unsigned long, because millis() counts past what an int can hold in under an hour.</a:t>
+              <a:t>unsigned long, because that is what millis() returns. It never goes negative.</a:t>
             </a:r>
           </a:p>
           <a:p>
@@ -27116,7 +27140,7 @@
                 </a:solidFill>
                 <a:latin typeface="Calibri"/>
               </a:rPr>
-              <a:t>This exact pattern appears five times in the full vehicle program.</a:t>
+              <a:t>The full vehicle program uses this exact pattern for its waiting blink and for the scanner.</a:t>
             </a:r>
           </a:p>
         </p:txBody>

--- a/ground-vehicle/docs/courses/beginner-ps3/l5_maneuvers_with_lights.pptx
+++ b/ground-vehicle/docs/courses/beginner-ps3/l5_maneuvers_with_lights.pptx
@@ -1271,7 +1271,7 @@
               <a:rPr sz="1200">
                 <a:latin typeface="Calibri"/>
               </a:rPr>
-              <a:t>ANSWER, brake lights: line 283 starts every pass assuming LIGHTS_STOPPED, and only driving or turning changes it. Then line 176, in showDrivingLights(), turns the rear bar brake red whenever the pattern is LIGHTS_STOPPED. So letting go of the stick IS what puts the brake lights on.</a:t>
+              <a:t>ANSWER, brake lights: line 288 starts every pass assuming LIGHTS_STOPPED, and only driving or turning changes it. Then line 179, in showDrivingLights(), turns the rear bar brake red whenever the pattern is LIGHTS_STOPPED. So letting go of the stick IS what puts the brake lights on.</a:t>
             </a:r>
           </a:p>
         </p:txBody>
